--- a/dist/초5/수학/자연수의계산/초5_수학_자연수의계산_02_약수와배수_학생용.pptx
+++ b/dist/초5/수학/자연수의계산/초5_수학_자연수의계산_02_약수와배수_학생용.pptx
@@ -120,13 +120,13 @@
   <p:extLst>
     <p:ext uri="{521415D9-36F7-43E2-AB2F-B90AF26B5E84}">
       <p14:sectionLst xmlns:p14="http://schemas.microsoft.com/office/powerpoint/2010/main">
-        <p14:section name="도입" id="{7bc98ca9-5d00-2701-aba3-d9f369e6e923}">
+        <p14:section name="도입" id="{f9d61bc2-a44f-aab1-0421-b3c4991dcacc}">
           <p14:sldIdLst>
             <p14:sldId id="256"/>
             <p14:sldId id="257"/>
           </p14:sldIdLst>
         </p14:section>
-        <p14:section name="개념" id="{78266937-5360-e05e-1c8b-d565543d298d}">
+        <p14:section name="개념" id="{a462d56a-c0f2-43c3-4055-95bd1fdae72f}">
           <p14:sldIdLst>
             <p14:sldId id="258"/>
             <p14:sldId id="259"/>
@@ -135,37 +135,37 @@
             <p14:sldId id="264"/>
           </p14:sldIdLst>
         </p14:section>
-        <p14:section name="연습" id="{60466bc3-a70d-5365-c6d6-be688096eb8f}">
+        <p14:section name="연습" id="{0320c36c-377e-d378-4c04-87701f6bffb9}">
           <p14:sldIdLst>
             <p14:sldId id="261"/>
             <p14:sldId id="263"/>
             <p14:sldId id="265"/>
           </p14:sldIdLst>
         </p14:section>
-        <p14:section name="개념" id="{07331ede-bab5-c8d6-8ab4-d419659f3aa2}">
+        <p14:section name="개념" id="{3a118006-8692-34d0-e154-319ae2e5a415}">
           <p14:sldIdLst/>
         </p14:section>
-        <p14:section name="연습" id="{d76bec26-d970-f426-6d10-2b5901c61500}">
+        <p14:section name="연습" id="{a347ee55-3d06-9243-f977-705d0ff65632}">
           <p14:sldIdLst/>
         </p14:section>
-        <p14:section name="개념" id="{8070677d-c2c2-de0a-b051-32182b16244c}">
+        <p14:section name="개념" id="{67b816d2-3840-4f2f-5e61-7580303e3352}">
           <p14:sldIdLst/>
         </p14:section>
-        <p14:section name="연습" id="{9937f085-3b49-54f0-ce52-7e1ef588a6e7}">
+        <p14:section name="연습" id="{684b2d9b-ff69-0e61-b8bc-16931e62ac11}">
           <p14:sldIdLst/>
         </p14:section>
-        <p14:section name="확인" id="{de077a68-0b4c-0d38-d670-f311fd0d3507}">
+        <p14:section name="확인" id="{8757f8f2-2d9a-53dc-b1a4-6b8f4bdfaf4b}">
           <p14:sldIdLst>
             <p14:sldId id="266"/>
             <p14:sldId id="267"/>
           </p14:sldIdLst>
         </p14:section>
-        <p14:section name="정리" id="{aabb3bbf-9bb4-0434-21c7-88d7e60894b1}">
+        <p14:section name="정리" id="{d262cdbf-f0dd-4338-06c6-27e0eefd9c67}">
           <p14:sldIdLst>
             <p14:sldId id="268"/>
           </p14:sldIdLst>
         </p14:section>
-        <p14:section name="보충" id="{4376bb21-f19a-02ff-d108-62f6709b9292}">
+        <p14:section name="보충" id="{dd99ee64-f6af-ee6c-3f65-8607f21a3b54}">
           <p14:sldIdLst>
             <p14:sldId id="269"/>
           </p14:sldIdLst>
